--- a/deliverables/芒得很职-国创赛路演PPT-5分钟黄金路径.pptx
+++ b/deliverables/芒得很职-国创赛路演PPT-5分钟黄金路径.pptx
@@ -792,7 +792,7 @@
           <a:lstStyle/>
           <a:p>
             <a:r>
-              <a:t>芒得很职不是又一个刷题软件。它把企业真实面试、需求评审、故障应急搬进 AI 多轮对抗：学生和 AI 面试官反复交锋，每一轮对话都自动挂上证据编号。底层是我们自研的多智能体系统 MARS-408——角色化编排、三层记忆、检索增强、证据核查加质量闸门，是一套工程化落地过的底座。</a:t>
+              <a:t>芒得很职不是又一个刷题软件。它把企业真实面试、需求评审、故障应急搬进 AI 多轮对抗：学生和 AI 面试官反复交锋，每一轮对话都自动挂上证据编号。底层是我们自研的多智能体技术底座——角色化编排、三层记忆、检索增强、证据核查加质量闸门，是一套工程化落地过的底座。</a:t>
             </a:r>
           </a:p>
         </p:txBody>
@@ -862,7 +862,7 @@
           <a:lstStyle/>
           <a:p>
             <a:r>
-              <a:t>完整闭环已经跑通：选场景、两问画像、6 到 8 轮对抗、按 6 维 ECD 软素养评估、证据一致性校验、最后给出提升路径和报告。后端五张数据表、六个核心接口、包括越权拦截都已在代码级验证；前端状态机、六维雷达和证据回放也都落地。这是演示里评委能直接看到的主路径。</a:t>
+              <a:t>完整闭环已经跑通：选场景、两问画像、6 到 8 轮对抗、按 6 维 ECD 软素养评估、证据一致性校验、最后给出提升路径和报告。后端五张数据表、核心链路接口、包括越权拦截都已在代码级验证；全站 API 规模是 244 个操作、227 条路径，这是运行时 openapi 实测出来的，不是估的；认证覆盖率 94.65%。前端状态机、六维雷达和证据回放也都落地。这是演示里评委能直接看到的主路径。</a:t>
             </a:r>
           </a:p>
         </p:txBody>
@@ -1072,7 +1072,7 @@
           <a:lstStyle/>
           <a:p>
             <a:r>
-              <a:t>我们不是只有 demo。技术底座 MARS-408 已经拿到国家级大创立项，说明工程化能力是被认可的。更关键的是工程纪律：和芒得很职同源的考研线知识图谱防伪证流水线，刚在昨天并入主干——136 个节点、18 条边，验证报告自带 8 条机器检查守护，连"复现命令能不能在别人机器跑通"都有守护盯着。同一套"写下的结论必须能被机器复验"的纪律，同时保着两条产品线。这就是我们敢说"可信"的底气。</a:t>
+              <a:t>我们不是只有 demo。技术底座已经拿到国家级大创立项，说明工程化能力是被认可的。更关键的是工程纪律：默认测试集 1389 项，1178 通过、208 跳过、3 个预期失败、零失败，覆盖率 54.96%，卡在 50 的门槛上；共识引擎实测均分 7.04、标准差 0.29，96 个样本、固定随机种子、6 个智能体，评委可以自己复现。和底座同源的知识图谱防伪证流水线，136 个节点、18 条边，验证报告自带 8 条机器检查守护，连"复现命令能不能在别人机器跑通"都有守护盯着。同一套"写下的结论必须能被机器复验"的纪律，同时保着两条产品线。这就是我们敢说"可信"的底气。</a:t>
             </a:r>
           </a:p>
         </p:txBody>
@@ -4329,7 +4329,7 @@
               </a:defRPr>
             </a:pPr>
             <a:r>
-              <a:t>新一代多智能体赋能的计算机类学生职业素养对抗实训平台  |  国创赛·高教主赛道·创意组</a:t>
+              <a:t>闽江大学  |  新一代多智能体赋能的计算机类学生职业素养对抗实训平台  |  国创赛·高教主赛道·创意组</a:t>
             </a:r>
           </a:p>
         </p:txBody>
@@ -4742,7 +4742,7 @@
               </a:defRPr>
             </a:pPr>
             <a:r>
-              <a:t>芒得很职 · 国创赛路演 · WS-B 物料线</a:t>
+              <a:t>芒得很职 · 计算机类学生职业素养对抗实训平台 · 国创赛路演 · 闽江大学</a:t>
             </a:r>
           </a:p>
         </p:txBody>
@@ -5153,7 +5153,7 @@
               </a:defRPr>
             </a:pPr>
             <a:r>
-              <a:t>芒得很职 · 国创赛路演 · WS-B 物料线</a:t>
+              <a:t>芒得很职 · 计算机类学生职业素养对抗实训平台 · 国创赛路演 · 闽江大学</a:t>
             </a:r>
           </a:p>
         </p:txBody>
@@ -5375,7 +5375,7 @@
               </a:defRPr>
             </a:pPr>
             <a:r>
-              <a:t>• 技术底座：自研多智能体系统 MARS-408</a:t>
+              <a:t>• 自研多智能体技术底座（已工程化落地）：</a:t>
             </a:r>
           </a:p>
           <a:p>
@@ -5449,7 +5449,7 @@
               </a:defRPr>
             </a:pPr>
             <a:r>
-              <a:t>芒得很职 · 国创赛路演 · WS-B 物料线</a:t>
+              <a:t>芒得很职 · 计算机类学生职业素养对抗实训平台 · 国创赛路演 · 闽江大学</a:t>
             </a:r>
           </a:p>
         </p:txBody>
@@ -5604,7 +5604,7 @@
         </p:nvSpPr>
         <p:spPr>
           <a:xfrm>
-            <a:off x="640080" y="1554480"/>
+            <a:off x="640080" y="1417320"/>
             <a:ext cx="10881360" cy="4937760"/>
           </a:xfrm>
           <a:prstGeom prst="rect">
@@ -5652,7 +5652,7 @@
               </a:defRPr>
             </a:pPr>
             <a:r>
-              <a:t>• 后端：5 张实训数据表、6 个核心 API 端点（含越权 403 拦截）已落地</a:t>
+              <a:t>• 后端：5 张实训数据表 + 核心链路 API（含越权 403 拦截）已落地</a:t>
             </a:r>
           </a:p>
           <a:p>
@@ -5671,7 +5671,7 @@
               </a:defRPr>
             </a:pPr>
             <a:r>
-              <a:t>• 前端：四步状态机 + SVG 六维雷达 + 证据链回放</a:t>
+              <a:t>    - 全站 API 规模：244 operations / 227 paths（app.openapi() 运行时实测）</a:t>
             </a:r>
           </a:p>
           <a:p>
@@ -5690,6 +5690,44 @@
               </a:defRPr>
             </a:pPr>
             <a:r>
+              <a:t>    - 认证覆盖率 94.65%（230/243）</a:t>
+            </a:r>
+          </a:p>
+          <a:p>
+            <a:pPr algn="l">
+              <a:lnSpc>
+                <a:spcPct val="115000"/>
+              </a:lnSpc>
+              <a:spcAft>
+                <a:spcPts val="1000"/>
+              </a:spcAft>
+              <a:defRPr sz="1800">
+                <a:solidFill>
+                  <a:srgbClr val="1A2533"/>
+                </a:solidFill>
+                <a:latin typeface="Microsoft YaHei"/>
+              </a:defRPr>
+            </a:pPr>
+            <a:r>
+              <a:t>• 前端：四步状态机 + SVG 六维雷达 + 证据链回放</a:t>
+            </a:r>
+          </a:p>
+          <a:p>
+            <a:pPr algn="l">
+              <a:lnSpc>
+                <a:spcPct val="115000"/>
+              </a:lnSpc>
+              <a:spcAft>
+                <a:spcPts val="1000"/>
+              </a:spcAft>
+              <a:defRPr sz="1800">
+                <a:solidFill>
+                  <a:srgbClr val="1A2533"/>
+                </a:solidFill>
+                <a:latin typeface="Microsoft YaHei"/>
+              </a:defRPr>
+            </a:pPr>
+            <a:r>
               <a:t>• 状态：上述 ✅ 均已代码级验证</a:t>
             </a:r>
           </a:p>
@@ -5726,7 +5764,7 @@
               </a:defRPr>
             </a:pPr>
             <a:r>
-              <a:t>芒得很职 · 国创赛路演 · WS-B 物料线</a:t>
+              <a:t>芒得很职 · 计算机类学生职业素养对抗实训平台 · 国创赛路演 · 闽江大学</a:t>
             </a:r>
           </a:p>
         </p:txBody>
@@ -6022,7 +6060,7 @@
               </a:defRPr>
             </a:pPr>
             <a:r>
-              <a:t>芒得很职 · 国创赛路演 · WS-B 物料线</a:t>
+              <a:t>芒得很职 · 计算机类学生职业素养对抗实训平台 · 国创赛路演 · 闽江大学</a:t>
             </a:r>
           </a:p>
         </p:txBody>
@@ -6280,7 +6318,7 @@
               </a:defRPr>
             </a:pPr>
             <a:r>
-              <a:t>芒得很职 · 国创赛路演 · WS-B 物料线</a:t>
+              <a:t>芒得很职 · 计算机类学生职业素养对抗实训平台 · 国创赛路演 · 闽江大学</a:t>
             </a:r>
           </a:p>
         </p:txBody>
@@ -6435,7 +6473,7 @@
         </p:nvSpPr>
         <p:spPr>
           <a:xfrm>
-            <a:off x="640080" y="1554480"/>
+            <a:off x="640080" y="1371600"/>
             <a:ext cx="10881360" cy="4937760"/>
           </a:xfrm>
           <a:prstGeom prst="rect">
@@ -6464,7 +6502,7 @@
               </a:defRPr>
             </a:pPr>
             <a:r>
-              <a:t>• MARS-408 多智能体底座已获国家级大创立项背书</a:t>
+              <a:t>• 芒得很职 多智能体底座已获国家级大创立项背书</a:t>
             </a:r>
           </a:p>
           <a:p>
@@ -6483,7 +6521,7 @@
               </a:defRPr>
             </a:pPr>
             <a:r>
-              <a:t>• 同源知识图谱防伪证流水线已于 2026-09-30 并入 main：136 节点 / 18 边</a:t>
+              <a:t>• 质量门禁可复现：默认测试集 1389 项 → 1178 passed / 208 skipped / 3 xfailed / 0 failed</a:t>
             </a:r>
           </a:p>
           <a:p>
@@ -6502,7 +6540,7 @@
               </a:defRPr>
             </a:pPr>
             <a:r>
-              <a:t>• 验证报告自带 8 条机检守护（哈希 / 逐行归属 / 锚点 / 复现命令可移植 + 元守护）</a:t>
+              <a:t>    - CI p0 档 67 条；覆盖率 54.96%（门禁 --cov-fail-under=50）</a:t>
             </a:r>
           </a:p>
           <a:p>
@@ -6521,7 +6559,64 @@
               </a:defRPr>
             </a:pPr>
             <a:r>
-              <a:t>• 同一套"写下的结论必须可被机器复验"的工程纪律，同时保障考研线与职业线</a:t>
+              <a:t>• 共识引擎实测：mean 7.0446 / std 0.2857（stratified 分布 / 96 样本 / seed 20261006 / n=6）</a:t>
+            </a:r>
+          </a:p>
+          <a:p>
+            <a:pPr algn="l">
+              <a:lnSpc>
+                <a:spcPct val="115000"/>
+              </a:lnSpc>
+              <a:spcAft>
+                <a:spcPts val="1000"/>
+              </a:spcAft>
+              <a:defRPr sz="1800">
+                <a:solidFill>
+                  <a:srgbClr val="1A2533"/>
+                </a:solidFill>
+                <a:latin typeface="Microsoft YaHei"/>
+              </a:defRPr>
+            </a:pPr>
+            <a:r>
+              <a:t>• 同源知识图谱防伪证流水线已于 2026-09-30 并入 main：136 节点 / 18 边</a:t>
+            </a:r>
+          </a:p>
+          <a:p>
+            <a:pPr algn="l">
+              <a:lnSpc>
+                <a:spcPct val="115000"/>
+              </a:lnSpc>
+              <a:spcAft>
+                <a:spcPts val="1000"/>
+              </a:spcAft>
+              <a:defRPr sz="1800">
+                <a:solidFill>
+                  <a:srgbClr val="1A2533"/>
+                </a:solidFill>
+                <a:latin typeface="Microsoft YaHei"/>
+              </a:defRPr>
+            </a:pPr>
+            <a:r>
+              <a:t>    - 验证报告自带 8 条机检守护（哈希 / 逐行归属 / 锚点 / 复现命令可移植 + 元守护）</a:t>
+            </a:r>
+          </a:p>
+          <a:p>
+            <a:pPr algn="l">
+              <a:lnSpc>
+                <a:spcPct val="115000"/>
+              </a:lnSpc>
+              <a:spcAft>
+                <a:spcPts val="1000"/>
+              </a:spcAft>
+              <a:defRPr sz="1800">
+                <a:solidFill>
+                  <a:srgbClr val="1A2533"/>
+                </a:solidFill>
+                <a:latin typeface="Microsoft YaHei"/>
+              </a:defRPr>
+            </a:pPr>
+            <a:r>
+              <a:t>• 含义：同一套"写下的结论必须可被机器复验"的工程纪律，同时保障考研线与职业线</a:t>
             </a:r>
           </a:p>
         </p:txBody>
@@ -6557,7 +6652,7 @@
               </a:defRPr>
             </a:pPr>
             <a:r>
-              <a:t>芒得很职 · 国创赛路演 · WS-B 物料线</a:t>
+              <a:t>芒得很职 · 计算机类学生职业素养对抗实训平台 · 国创赛路演 · 闽江大学</a:t>
             </a:r>
           </a:p>
         </p:txBody>
@@ -6853,7 +6948,7 @@
               </a:defRPr>
             </a:pPr>
             <a:r>
-              <a:t>芒得很职 · 国创赛路演 · WS-B 物料线</a:t>
+              <a:t>芒得很职 · 计算机类学生职业素养对抗实训平台 · 国创赛路演 · 闽江大学</a:t>
             </a:r>
           </a:p>
         </p:txBody>
@@ -7130,7 +7225,7 @@
               </a:defRPr>
             </a:pPr>
             <a:r>
-              <a:t>芒得很职 · 国创赛路演 · WS-B 物料线</a:t>
+              <a:t>芒得很职 · 计算机类学生职业素养对抗实训平台 · 国创赛路演 · 闽江大学</a:t>
             </a:r>
           </a:p>
         </p:txBody>

--- a/deliverables/芒得很职-国创赛路演PPT-5分钟黄金路径.pptx
+++ b/deliverables/芒得很职-国创赛路演PPT-5分钟黄金路径.pptx
@@ -862,7 +862,7 @@
           <a:lstStyle/>
           <a:p>
             <a:r>
-              <a:t>完整闭环已经跑通：选场景、两问画像、6 到 8 轮对抗、按 6 维 ECD 软素养评估、证据一致性校验、最后给出提升路径和报告。后端五张数据表、核心链路接口、包括越权拦截都已在代码级验证；全站 API 规模是 244 个操作、227 条路径，这是运行时 openapi 实测出来的，不是估的；认证覆盖率 94.65%。前端状态机、六维雷达和证据回放也都落地。这是演示里评委能直接看到的主路径。</a:t>
+              <a:t>完整闭环已经跑通：选场景、两问画像、6 到 8 轮对抗、按 6 维 ECD 软素养评估、证据一致性校验、最后给出提升路径和报告。后端五张数据表、核心链路接口、包括越权拦截都已在代码级验证；全站 API 规模是 244 个操作、227 条路径，这是运行时 openapi 实测出来的，不是估的；认证覆盖率 94.67%。前端状态机、六维雷达和证据回放也都落地。这是演示里评委能直接看到的主路径。</a:t>
             </a:r>
           </a:p>
         </p:txBody>
@@ -1072,7 +1072,7 @@
           <a:lstStyle/>
           <a:p>
             <a:r>
-              <a:t>我们不是只有 demo。技术底座已经拿到国家级大创立项，说明工程化能力是被认可的。更关键的是工程纪律：默认测试集 1389 项，1178 通过、208 跳过、3 个预期失败、零失败，覆盖率 54.96%，卡在 50 的门槛上；共识引擎实测均分 7.04、标准差 0.29，96 个样本、固定随机种子、6 个智能体，评委可以自己复现。和底座同源的知识图谱防伪证流水线，136 个节点、18 条边，验证报告自带 8 条机器检查守护，连"复现命令能不能在别人机器跑通"都有守护盯着。同一套"写下的结论必须能被机器复验"的纪律，同时保着两条产品线。这就是我们敢说"可信"的底气。</a:t>
+              <a:t>我们不是只有 demo。技术底座已经拿到国家级大创立项，说明工程化能力是被认可的。更关键的是工程纪律：CI 默认档 1428 项，1389 通过、38 跳过、1 个预期失败、零失败，覆盖率 54.96%，卡在 50 的门槛上；共识引擎实测均分 7.04、标准差 0.29，96 个样本、固定随机种子、6 个智能体，评委可以自己复现。和底座同源的知识图谱防伪证流水线，136 个节点、18 条边，验证报告自带 8 条机器检查守护，连"复现命令能不能在别人机器跑通"都有守护盯着。同一套"写下的结论必须能被机器复验"的纪律，同时保着两条产品线。这就是我们敢说"可信"的底气。</a:t>
             </a:r>
           </a:p>
         </p:txBody>
@@ -5690,7 +5690,7 @@
               </a:defRPr>
             </a:pPr>
             <a:r>
-              <a:t>    - 认证覆盖率 94.65%（230/243）</a:t>
+              <a:t>    - 认证覆盖率 94.67%（231/244）</a:t>
             </a:r>
           </a:p>
           <a:p>
@@ -6521,7 +6521,7 @@
               </a:defRPr>
             </a:pPr>
             <a:r>
-              <a:t>• 质量门禁可复现：默认测试集 1389 项 → 1178 passed / 208 skipped / 3 xfailed / 0 failed</a:t>
+              <a:t>• 质量门禁可复现：CI 默认档 1428 项 → 1389 passed / 38 skipped / 1 xfailed / 0 failed</a:t>
             </a:r>
           </a:p>
           <a:p>

--- a/deliverables/芒得很职-国创赛路演PPT-5分钟黄金路径.pptx
+++ b/deliverables/芒得很职-国创赛路演PPT-5分钟黄金路径.pptx
@@ -1072,7 +1072,7 @@
           <a:lstStyle/>
           <a:p>
             <a:r>
-              <a:t>我们不是只有 demo。技术底座已经拿到国家级大创立项，说明工程化能力是被认可的。更关键的是工程纪律：CI 默认档 1428 项，1389 通过、38 跳过、1 个预期失败、零失败，覆盖率 54.96%，卡在 50 的门槛上；共识引擎实测均分 7.04、标准差 0.29，96 个样本、固定随机种子、6 个智能体，评委可以自己复现。和底座同源的知识图谱防伪证流水线，136 个节点、18 条边，验证报告自带 8 条机器检查守护，连"复现命令能不能在别人机器跑通"都有守护盯着。同一套"写下的结论必须能被机器复验"的纪律，同时保着两条产品线。这就是我们敢说"可信"的底气。</a:t>
+              <a:t>我们不是只有 demo。技术底座已经拿到国家级大创立项，说明工程化能力是被认可的。更关键的是工程纪律：CI 默认档 1428 项，1389 通过、38 跳过、1 个预期失败、零失败，覆盖率 61%，超过 50 的门槛 11 个百分点；共识引擎实测均分 7.04、标准差 0.29，96 个样本、固定随机种子、6 个智能体，评委可以自己复现。和底座同源的知识图谱防伪证流水线，136 个节点、18 条边，验证报告自带 8 条机器检查守护，连"复现命令能不能在别人机器跑通"都有守护盯着。同一套"写下的结论必须能被机器复验"的纪律，同时保着两条产品线。这就是我们敢说"可信"的底气。</a:t>
             </a:r>
           </a:p>
         </p:txBody>
@@ -6540,7 +6540,7 @@
               </a:defRPr>
             </a:pPr>
             <a:r>
-              <a:t>    - CI p0 档 67 条；覆盖率 54.96%（门禁 --cov-fail-under=50）</a:t>
+              <a:t>    - CI p0 档 67 条；覆盖率 61%（门禁 --cov-fail-under=50，余量 11pp）</a:t>
             </a:r>
           </a:p>
           <a:p>

--- a/deliverables/芒得很职-国创赛路演PPT-5分钟黄金路径.pptx
+++ b/deliverables/芒得很职-国创赛路演PPT-5分钟黄金路径.pptx
@@ -862,7 +862,7 @@
           <a:lstStyle/>
           <a:p>
             <a:r>
-              <a:t>完整闭环已经跑通：选场景、两问画像、6 到 8 轮对抗、按 6 维 ECD 软素养评估、证据一致性校验、最后给出提升路径和报告。后端五张数据表、核心链路接口、包括越权拦截都已在代码级验证；全站 API 规模是 244 个操作、227 条路径，这是运行时 openapi 实测出来的，不是估的；认证覆盖率 94.67%。前端状态机、六维雷达和证据回放也都落地。这是演示里评委能直接看到的主路径。</a:t>
+              <a:t>完整闭环已经跑通：选场景、两问画像、6 到 8 轮对抗、按 6 维 ECD 软素养评估、证据一致性校验、最后给出提升路径和报告。后端五张数据表、核心链路接口、包括越权拦截都已在代码级验证；全站 API 规模是 261 个操作、243 条路径，这是运行时 openapi 实测出来的，不是估的；认证覆盖率 95.02%。前端状态机、六维雷达和证据回放也都落地。这是演示里评委能直接看到的主路径。</a:t>
             </a:r>
           </a:p>
         </p:txBody>
@@ -1072,7 +1072,7 @@
           <a:lstStyle/>
           <a:p>
             <a:r>
-              <a:t>我们不是只有 demo。技术底座已经拿到国家级大创立项，说明工程化能力是被认可的。更关键的是工程纪律：CI 默认档 1428 项，1389 通过、38 跳过、1 个预期失败、零失败，覆盖率 61%，超过 50 的门槛 11 个百分点；共识引擎实测均分 7.04、标准差 0.29，96 个样本、固定随机种子、6 个智能体，评委可以自己复现。和底座同源的知识图谱防伪证流水线，136 个节点、18 条边，验证报告自带 8 条机器检查守护，连"复现命令能不能在别人机器跑通"都有守护盯着。同一套"写下的结论必须能被机器复验"的纪律，同时保着两条产品线。这就是我们敢说"可信"的底气。</a:t>
+              <a:t>我们不是只有 demo。技术底座已经拿到国家级大创立项，说明工程化能力是被认可的。更关键的是工程纪律：CI 默认档 1732 run（1741 collected），1693 通过、38 跳过、1 个预期失败、零失败，覆盖率 57.19%，超过 50 的门槛 7.189999999999998 个百分点；共识引擎实测均分 7.04、标准差 0.29，96 个样本、固定随机种子、6 个智能体，评委可以自己复现。和底座同源的知识图谱防伪证流水线，136 个节点、18 条边，验证报告自带 8 条机器检查守护，连"复现命令能不能在别人机器跑通"都有守护盯着。同一套"写下的结论必须能被机器复验"的纪律，同时保着两条产品线。这就是我们敢说"可信"的底气。</a:t>
             </a:r>
           </a:p>
         </p:txBody>
@@ -5671,7 +5671,7 @@
               </a:defRPr>
             </a:pPr>
             <a:r>
-              <a:t>    - 全站 API 规模：244 operations / 227 paths（app.openapi() 运行时实测）</a:t>
+              <a:t>    - 全站 API 规模：261 operations / 243 paths（app.openapi() 运行时实测）</a:t>
             </a:r>
           </a:p>
           <a:p>
@@ -5690,7 +5690,7 @@
               </a:defRPr>
             </a:pPr>
             <a:r>
-              <a:t>    - 认证覆盖率 94.67%（231/244）</a:t>
+              <a:t>    - 认证覆盖率 95.02%（248/261）</a:t>
             </a:r>
           </a:p>
           <a:p>
@@ -6521,7 +6521,7 @@
               </a:defRPr>
             </a:pPr>
             <a:r>
-              <a:t>• 质量门禁可复现：CI 默认档 1428 项 → 1389 passed / 38 skipped / 1 xfailed / 0 failed</a:t>
+              <a:t>• 质量门禁可复现：CI 默认档 1732 run（1741 collected）→ 1693 passed / 38 skipped / 1 xfailed / 0 failed</a:t>
             </a:r>
           </a:p>
           <a:p>
@@ -6540,7 +6540,7 @@
               </a:defRPr>
             </a:pPr>
             <a:r>
-              <a:t>    - CI p0 档 67 条；覆盖率 61%（门禁 --cov-fail-under=50，余量 11pp）</a:t>
+              <a:t>    - CI p0 档 67 条；覆盖率 57.19%（门禁 --cov-fail-under=50，余量 7.189999999999998pp）</a:t>
             </a:r>
           </a:p>
           <a:p>

--- a/deliverables/芒得很职-国创赛路演PPT-5分钟黄金路径.pptx
+++ b/deliverables/芒得很职-国创赛路演PPT-5分钟黄金路径.pptx
@@ -1072,7 +1072,7 @@
           <a:lstStyle/>
           <a:p>
             <a:r>
-              <a:t>我们不是只有 demo。技术底座已经拿到国家级大创立项，说明工程化能力是被认可的。更关键的是工程纪律：CI 默认档 1732 run（1741 collected），1693 通过、38 跳过、1 个预期失败、零失败，覆盖率 57.19%，超过 50 的门槛 7.189999999999998 个百分点；共识引擎实测均分 7.04、标准差 0.29，96 个样本、固定随机种子、6 个智能体，评委可以自己复现。和底座同源的知识图谱防伪证流水线，136 个节点、18 条边，验证报告自带 8 条机器检查守护，连"复现命令能不能在别人机器跑通"都有守护盯着。同一套"写下的结论必须能被机器复验"的纪律，同时保着两条产品线。这就是我们敢说"可信"的底气。</a:t>
+              <a:t>我们不是只有 demo。技术底座已经拿到国家级大创立项，说明工程化能力是被认可的。更关键的是工程纪律：CI 默认档 1776 run（1785 collected），1737 通过、38 跳过、1 个预期失败、零失败，覆盖率 57.19%，超过 50 的门槛 7.189999999999998 个百分点；共识引擎实测均分 7.04、标准差 0.29，96 个样本、固定随机种子、6 个智能体，评委可以自己复现。和底座同源的知识图谱防伪证流水线，136 个节点、18 条边，验证报告自带 8 条机器检查守护，连"复现命令能不能在别人机器跑通"都有守护盯着。同一套"写下的结论必须能被机器复验"的纪律，同时保着两条产品线。这就是我们敢说"可信"的底气。</a:t>
             </a:r>
           </a:p>
         </p:txBody>
@@ -6521,7 +6521,7 @@
               </a:defRPr>
             </a:pPr>
             <a:r>
-              <a:t>• 质量门禁可复现：CI 默认档 1732 run（1741 collected）→ 1693 passed / 38 skipped / 1 xfailed / 0 failed</a:t>
+              <a:t>• 质量门禁可复现：CI 默认档 1776 run（1785 collected）→ 1737 passed / 38 skipped / 1 xfailed / 0 failed</a:t>
             </a:r>
           </a:p>
           <a:p>
